--- a/premises-verification_8.pptx
+++ b/premises-verification_8.pptx
@@ -2100,7 +2100,7 @@
                 <a:ea typeface="Cambria" panose="02040503050406030204" pitchFamily="18" charset="0"/>
                 <a:cs typeface="Calibri" pitchFamily="34" charset="-120"/>
               </a:rPr>
-              <a:t>Product case  ·  Loans24</a:t>
+              <a:t>Product case</a:t>
             </a:r>
             <a:endParaRPr lang="en-US" sz="1600" dirty="0">
               <a:latin typeface="Cambria" panose="02040503050406030204" pitchFamily="18" charset="0"/>
